--- a/Docs/Finland_forest_IIASA_meeting_2026-10-09.pptx
+++ b/Docs/Finland_forest_IIASA_meeting_2026-10-09.pptx
@@ -18,11 +18,9 @@
     <p:sldId id="266" r:id="rId12"/>
     <p:sldId id="267" r:id="rId13"/>
     <p:sldId id="268" r:id="rId14"/>
-    <p:sldId id="269" r:id="rId15"/>
+    <p:sldId id="271" r:id="rId15"/>
     <p:sldId id="270" r:id="rId16"/>
-    <p:sldId id="271" r:id="rId17"/>
-    <p:sldId id="272" r:id="rId18"/>
-    <p:sldId id="273" r:id="rId19"/>
+    <p:sldId id="273" r:id="rId17"/>
   </p:sldIdLst>
   <p:sldSz cx="12192000" cy="6858000"/>
   <p:notesSz cx="6858000" cy="9144000"/>
@@ -319,7 +317,7 @@
           <a:p>
             <a:fld id="{5BCAD085-E8A6-8845-BD4E-CB4CCA059FC4}" type="datetimeFigureOut">
               <a:rPr lang="en-US" smtClean="0"/>
-              <a:t>10/8/2026</a:t>
+              <a:t>10/9/2026</a:t>
             </a:fld>
             <a:endParaRPr lang="en-US"/>
           </a:p>
@@ -487,7 +485,7 @@
           <a:p>
             <a:fld id="{5BCAD085-E8A6-8845-BD4E-CB4CCA059FC4}" type="datetimeFigureOut">
               <a:rPr lang="en-US" smtClean="0"/>
-              <a:t>10/8/2026</a:t>
+              <a:t>10/9/2026</a:t>
             </a:fld>
             <a:endParaRPr lang="en-US"/>
           </a:p>
@@ -665,7 +663,7 @@
           <a:p>
             <a:fld id="{5BCAD085-E8A6-8845-BD4E-CB4CCA059FC4}" type="datetimeFigureOut">
               <a:rPr lang="en-US" smtClean="0"/>
-              <a:t>10/8/2026</a:t>
+              <a:t>10/9/2026</a:t>
             </a:fld>
             <a:endParaRPr lang="en-US"/>
           </a:p>
@@ -833,7 +831,7 @@
           <a:p>
             <a:fld id="{5BCAD085-E8A6-8845-BD4E-CB4CCA059FC4}" type="datetimeFigureOut">
               <a:rPr lang="en-US" smtClean="0"/>
-              <a:t>10/8/2026</a:t>
+              <a:t>10/9/2026</a:t>
             </a:fld>
             <a:endParaRPr lang="en-US"/>
           </a:p>
@@ -1078,7 +1076,7 @@
           <a:p>
             <a:fld id="{5BCAD085-E8A6-8845-BD4E-CB4CCA059FC4}" type="datetimeFigureOut">
               <a:rPr lang="en-US" smtClean="0"/>
-              <a:t>10/8/2026</a:t>
+              <a:t>10/9/2026</a:t>
             </a:fld>
             <a:endParaRPr lang="en-US"/>
           </a:p>
@@ -1363,7 +1361,7 @@
           <a:p>
             <a:fld id="{5BCAD085-E8A6-8845-BD4E-CB4CCA059FC4}" type="datetimeFigureOut">
               <a:rPr lang="en-US" smtClean="0"/>
-              <a:t>10/8/2026</a:t>
+              <a:t>10/9/2026</a:t>
             </a:fld>
             <a:endParaRPr lang="en-US"/>
           </a:p>
@@ -1782,7 +1780,7 @@
           <a:p>
             <a:fld id="{5BCAD085-E8A6-8845-BD4E-CB4CCA059FC4}" type="datetimeFigureOut">
               <a:rPr lang="en-US" smtClean="0"/>
-              <a:t>10/8/2026</a:t>
+              <a:t>10/9/2026</a:t>
             </a:fld>
             <a:endParaRPr lang="en-US"/>
           </a:p>
@@ -1899,7 +1897,7 @@
           <a:p>
             <a:fld id="{5BCAD085-E8A6-8845-BD4E-CB4CCA059FC4}" type="datetimeFigureOut">
               <a:rPr lang="en-US" smtClean="0"/>
-              <a:t>10/8/2026</a:t>
+              <a:t>10/9/2026</a:t>
             </a:fld>
             <a:endParaRPr lang="en-US"/>
           </a:p>
@@ -1994,7 +1992,7 @@
           <a:p>
             <a:fld id="{5BCAD085-E8A6-8845-BD4E-CB4CCA059FC4}" type="datetimeFigureOut">
               <a:rPr lang="en-US" smtClean="0"/>
-              <a:t>10/8/2026</a:t>
+              <a:t>10/9/2026</a:t>
             </a:fld>
             <a:endParaRPr lang="en-US"/>
           </a:p>
@@ -2269,7 +2267,7 @@
           <a:p>
             <a:fld id="{5BCAD085-E8A6-8845-BD4E-CB4CCA059FC4}" type="datetimeFigureOut">
               <a:rPr lang="en-US" smtClean="0"/>
-              <a:t>10/8/2026</a:t>
+              <a:t>10/9/2026</a:t>
             </a:fld>
             <a:endParaRPr lang="en-US"/>
           </a:p>
@@ -2521,7 +2519,7 @@
           <a:p>
             <a:fld id="{5BCAD085-E8A6-8845-BD4E-CB4CCA059FC4}" type="datetimeFigureOut">
               <a:rPr lang="en-US" smtClean="0"/>
-              <a:t>10/8/2026</a:t>
+              <a:t>10/9/2026</a:t>
             </a:fld>
             <a:endParaRPr lang="en-US"/>
           </a:p>
@@ -2732,7 +2730,7 @@
           <a:p>
             <a:fld id="{5BCAD085-E8A6-8845-BD4E-CB4CCA059FC4}" type="datetimeFigureOut">
               <a:rPr lang="en-US" smtClean="0"/>
-              <a:t>10/8/2026</a:t>
+              <a:t>10/9/2026</a:t>
             </a:fld>
             <a:endParaRPr lang="en-US"/>
           </a:p>
@@ -3488,7 +3486,7 @@
         <p:spPr>
           <a:xfrm>
             <a:off x="640080" y="1417320"/>
-            <a:ext cx="11064240" cy="4754880"/>
+            <a:ext cx="11064240" cy="2734082"/>
           </a:xfrm>
           <a:prstGeom prst="rect">
             <a:avLst/>
@@ -3507,7 +3505,7 @@
               </a:spcAft>
             </a:pPr>
             <a:r>
-              <a:rPr sz="1350" b="1" i="0">
+              <a:rPr sz="1350" b="1" i="0" dirty="0">
                 <a:solidFill>
                   <a:srgbClr val="0E5A3E"/>
                 </a:solidFill>
@@ -3516,7 +3514,7 @@
               <a:t>—  </a:t>
             </a:r>
             <a:r>
-              <a:rPr sz="1350" b="1" i="0">
+              <a:rPr sz="1350" b="1" i="0" dirty="0">
                 <a:solidFill>
                   <a:srgbClr val="1F2D2D"/>
                 </a:solidFill>
@@ -3525,7 +3523,7 @@
               <a:t>Replace the hand-built curves with physically modelled, assortment-level harvest from G4M</a:t>
             </a:r>
             <a:r>
-              <a:rPr sz="1350" b="0" i="0">
+              <a:rPr sz="1350" b="0" i="0" dirty="0">
                 <a:solidFill>
                   <a:srgbClr val="1F2D2D"/>
                 </a:solidFill>
@@ -3541,7 +3539,7 @@
               </a:spcAft>
             </a:pPr>
             <a:r>
-              <a:rPr sz="1350" b="1" i="0">
+              <a:rPr sz="1350" b="1" i="0" dirty="0">
                 <a:solidFill>
                   <a:srgbClr val="0E5A3E"/>
                 </a:solidFill>
@@ -3550,7 +3548,7 @@
               <a:t>—  </a:t>
             </a:r>
             <a:r>
-              <a:rPr sz="1350" b="1" i="0">
+              <a:rPr sz="1350" b="1" i="0" dirty="0">
                 <a:solidFill>
                   <a:srgbClr val="1F2D2D"/>
                 </a:solidFill>
@@ -3559,13 +3557,49 @@
               <a:t>Extract per year:</a:t>
             </a:r>
             <a:r>
-              <a:rPr sz="1350" b="0" i="0">
-                <a:solidFill>
-                  <a:srgbClr val="1F2D2D"/>
-                </a:solidFill>
-                <a:latin typeface="Arial"/>
-              </a:rPr>
-              <a:t> harvestable volume by assortment (sawlogs, pulpwood, logging residues, fuelwood, stumps); ecologically-available fractions; net forest + HWP carbon flux.</a:t>
+              <a:rPr sz="1350" b="0" i="0" dirty="0">
+                <a:solidFill>
+                  <a:srgbClr val="1F2D2D"/>
+                </a:solidFill>
+                <a:latin typeface="Arial"/>
+              </a:rPr>
+              <a:t> harvestable volume by assortment (sawlogs, pulpwood, logging residues, fuelwood, stumps); ecologically-available fractions</a:t>
+            </a:r>
+            <a:r>
+              <a:rPr lang="it-IT" sz="1350" b="0" i="0" dirty="0">
+                <a:solidFill>
+                  <a:srgbClr val="1F2D2D"/>
+                </a:solidFill>
+                <a:latin typeface="Arial"/>
+              </a:rPr>
+              <a:t> (</a:t>
+            </a:r>
+            <a:r>
+              <a:rPr lang="it-IT" sz="1350" b="0" i="0" dirty="0" err="1">
+                <a:solidFill>
+                  <a:srgbClr val="1F2D2D"/>
+                </a:solidFill>
+                <a:latin typeface="Arial"/>
+              </a:rPr>
+              <a:t>deadwood</a:t>
+            </a:r>
+            <a:r>
+              <a:rPr lang="it-IT" sz="1350" b="0" i="0" dirty="0">
+                <a:solidFill>
+                  <a:srgbClr val="1F2D2D"/>
+                </a:solidFill>
+                <a:latin typeface="Arial"/>
+              </a:rPr>
+              <a:t>)</a:t>
+            </a:r>
+            <a:r>
+              <a:rPr sz="1350" b="0" i="0" dirty="0">
+                <a:solidFill>
+                  <a:srgbClr val="1F2D2D"/>
+                </a:solidFill>
+                <a:latin typeface="Arial"/>
+              </a:rPr>
+              <a:t>; net forest + HWP carbon flux.</a:t>
             </a:r>
           </a:p>
           <a:p>
@@ -3575,7 +3609,7 @@
               </a:spcAft>
             </a:pPr>
             <a:r>
-              <a:rPr sz="1350" b="1" i="0">
+              <a:rPr sz="1350" b="1" i="0" dirty="0">
                 <a:solidFill>
                   <a:srgbClr val="0E5A3E"/>
                 </a:solidFill>
@@ -3584,7 +3618,7 @@
               <a:t>—  </a:t>
             </a:r>
             <a:r>
-              <a:rPr sz="1350" b="1" i="0">
+              <a:rPr sz="1350" b="1" i="0" dirty="0">
                 <a:solidFill>
                   <a:srgbClr val="1F2D2D"/>
                 </a:solidFill>
@@ -3593,7 +3627,7 @@
               <a:t>Derive the energy-available volume as the residual</a:t>
             </a:r>
             <a:r>
-              <a:rPr sz="1350" b="0" i="0">
+              <a:rPr sz="1350" b="0" i="0" dirty="0">
                 <a:solidFill>
                   <a:srgbClr val="1F2D2D"/>
                 </a:solidFill>
@@ -3609,7 +3643,7 @@
               </a:spcAft>
             </a:pPr>
             <a:r>
-              <a:rPr sz="1350" b="1" i="0">
+              <a:rPr sz="1350" b="1" i="0" dirty="0">
                 <a:solidFill>
                   <a:srgbClr val="0E5A3E"/>
                 </a:solidFill>
@@ -3618,7 +3652,7 @@
               <a:t>—  </a:t>
             </a:r>
             <a:r>
-              <a:rPr sz="1350" b="1" i="0">
+              <a:rPr sz="1350" b="1" i="0" dirty="0">
                 <a:solidFill>
                   <a:srgbClr val="1F2D2D"/>
                 </a:solidFill>
@@ -3627,13 +3661,49 @@
               <a:t>Map assortments → existing WOOD_FI1…FI4 steps</a:t>
             </a:r>
             <a:r>
-              <a:rPr sz="1350" b="0" i="0">
-                <a:solidFill>
-                  <a:srgbClr val="1F2D2D"/>
-                </a:solidFill>
-                <a:latin typeface="Arial"/>
-              </a:rPr>
-              <a:t> (volume→energy factors, costs from Finnish statistics / RED II). EnergyScope implementation unchanged.</a:t>
+              <a:rPr sz="1350" b="0" i="0" dirty="0">
+                <a:solidFill>
+                  <a:srgbClr val="1F2D2D"/>
+                </a:solidFill>
+                <a:latin typeface="Arial"/>
+              </a:rPr>
+              <a:t> (</a:t>
+            </a:r>
+            <a:r>
+              <a:rPr sz="1350" b="0" i="0" dirty="0" err="1">
+                <a:solidFill>
+                  <a:srgbClr val="1F2D2D"/>
+                </a:solidFill>
+                <a:latin typeface="Arial"/>
+              </a:rPr>
+              <a:t>volume→energy</a:t>
+            </a:r>
+            <a:r>
+              <a:rPr sz="1350" b="0" i="0" dirty="0">
+                <a:solidFill>
+                  <a:srgbClr val="1F2D2D"/>
+                </a:solidFill>
+                <a:latin typeface="Arial"/>
+              </a:rPr>
+              <a:t> factors, costs from Finnish statistics / RED II). </a:t>
+            </a:r>
+            <a:r>
+              <a:rPr sz="1350" b="0" i="0" dirty="0" err="1">
+                <a:solidFill>
+                  <a:srgbClr val="1F2D2D"/>
+                </a:solidFill>
+                <a:latin typeface="Arial"/>
+              </a:rPr>
+              <a:t>EnergyScope</a:t>
+            </a:r>
+            <a:r>
+              <a:rPr sz="1350" b="0" i="0" dirty="0">
+                <a:solidFill>
+                  <a:srgbClr val="1F2D2D"/>
+                </a:solidFill>
+                <a:latin typeface="Arial"/>
+              </a:rPr>
+              <a:t> implementation unchanged.</a:t>
             </a:r>
           </a:p>
           <a:p>
@@ -3643,7 +3713,7 @@
               </a:spcAft>
             </a:pPr>
             <a:r>
-              <a:rPr sz="1350" b="1" i="0">
+              <a:rPr sz="1350" b="1" i="0" dirty="0">
                 <a:solidFill>
                   <a:srgbClr val="0E5A3E"/>
                 </a:solidFill>
@@ -3652,7 +3722,7 @@
               <a:t>—  </a:t>
             </a:r>
             <a:r>
-              <a:rPr sz="1350" b="1" i="0">
+              <a:rPr sz="1350" b="1" i="0" dirty="0">
                 <a:solidFill>
                   <a:srgbClr val="B9770E"/>
                 </a:solidFill>
@@ -3661,7 +3731,7 @@
               <a:t>Structural question to settle:</a:t>
             </a:r>
             <a:r>
-              <a:rPr sz="1350" b="0" i="0">
+              <a:rPr sz="1350" b="0" i="0" dirty="0">
                 <a:solidFill>
                   <a:srgbClr val="1F2D2D"/>
                 </a:solidFill>
@@ -3910,7 +3980,7 @@
         <p:spPr>
           <a:xfrm>
             <a:off x="640080" y="1417320"/>
-            <a:ext cx="11064240" cy="4754880"/>
+            <a:ext cx="11064240" cy="3716402"/>
           </a:xfrm>
           <a:prstGeom prst="rect">
             <a:avLst/>
@@ -3929,7 +3999,7 @@
               </a:spcAft>
             </a:pPr>
             <a:r>
-              <a:rPr sz="1350" b="1" i="0">
+              <a:rPr sz="1350" b="1" i="0" dirty="0">
                 <a:solidFill>
                   <a:srgbClr val="0E5A3E"/>
                 </a:solidFill>
@@ -3938,16 +4008,34 @@
               <a:t>—  </a:t>
             </a:r>
             <a:r>
-              <a:rPr sz="1350" b="1" i="0">
-                <a:solidFill>
-                  <a:srgbClr val="1F2D2D"/>
-                </a:solidFill>
-                <a:latin typeface="Arial"/>
-              </a:rPr>
-              <a:t>Use G4M's disturbance-aware runs (+ ForestNavigator FLAM / bark-beetle / wind) to build time-profiled curves around a compound event</a:t>
-            </a:r>
-            <a:r>
-              <a:rPr sz="1350" b="0" i="0">
+              <a:rPr sz="1350" b="1" i="0" dirty="0">
+                <a:solidFill>
+                  <a:srgbClr val="1F2D2D"/>
+                </a:solidFill>
+                <a:latin typeface="Arial"/>
+              </a:rPr>
+              <a:t>Use G4M's disturbance-aware runs (+ </a:t>
+            </a:r>
+            <a:r>
+              <a:rPr sz="1350" b="1" i="0" dirty="0" err="1">
+                <a:solidFill>
+                  <a:srgbClr val="1F2D2D"/>
+                </a:solidFill>
+                <a:latin typeface="Arial"/>
+              </a:rPr>
+              <a:t>ForestNavigator</a:t>
+            </a:r>
+            <a:r>
+              <a:rPr sz="1350" b="1" i="0" dirty="0">
+                <a:solidFill>
+                  <a:srgbClr val="1F2D2D"/>
+                </a:solidFill>
+                <a:latin typeface="Arial"/>
+              </a:rPr>
+              <a:t> FLAM / bark-beetle / wind) to build time-profiled curves around a compound event</a:t>
+            </a:r>
+            <a:r>
+              <a:rPr sz="1350" b="0" i="0" dirty="0">
                 <a:solidFill>
                   <a:srgbClr val="1F2D2D"/>
                 </a:solidFill>
@@ -3963,7 +4051,7 @@
               </a:spcAft>
             </a:pPr>
             <a:r>
-              <a:rPr sz="1350" b="1" i="0">
+              <a:rPr sz="1350" b="1" i="0" dirty="0">
                 <a:solidFill>
                   <a:srgbClr val="0E5A3E"/>
                 </a:solidFill>
@@ -3972,7 +4060,7 @@
               <a:t>—  </a:t>
             </a:r>
             <a:r>
-              <a:rPr sz="1350" b="1" i="0">
+              <a:rPr sz="1350" b="1" i="0" dirty="0">
                 <a:solidFill>
                   <a:srgbClr val="1F2D2D"/>
                 </a:solidFill>
@@ -3988,7 +4076,7 @@
               </a:spcAft>
             </a:pPr>
             <a:r>
-              <a:rPr sz="1350" b="1" i="0">
+              <a:rPr sz="1350" b="1" i="0" dirty="0">
                 <a:solidFill>
                   <a:srgbClr val="5A6363"/>
                 </a:solidFill>
@@ -3997,7 +4085,7 @@
               <a:t>·   </a:t>
             </a:r>
             <a:r>
-              <a:rPr sz="1350" b="1" i="0">
+              <a:rPr sz="1350" b="1" i="0" dirty="0">
                 <a:solidFill>
                   <a:srgbClr val="1F2D2D"/>
                 </a:solidFill>
@@ -4006,13 +4094,49 @@
               <a:t>Calamity-wood pulse</a:t>
             </a:r>
             <a:r>
-              <a:rPr sz="1350" b="0" i="0">
-                <a:solidFill>
-                  <a:srgbClr val="1F2D2D"/>
-                </a:solidFill>
-                <a:latin typeface="Arial"/>
-              </a:rPr>
-              <a:t> — a large, cheap, time-limited (~18–24 mo) salvage volume, quality-penalised (blue-stain, moisture, LHV −10…−25%).</a:t>
+              <a:rPr sz="1350" b="0" i="0" dirty="0">
+                <a:solidFill>
+                  <a:srgbClr val="1F2D2D"/>
+                </a:solidFill>
+                <a:latin typeface="Arial"/>
+              </a:rPr>
+              <a:t> — a large, cheap, time-limited (~18–24 </a:t>
+            </a:r>
+            <a:r>
+              <a:rPr sz="1350" b="0" i="0" dirty="0" err="1">
+                <a:solidFill>
+                  <a:srgbClr val="1F2D2D"/>
+                </a:solidFill>
+                <a:latin typeface="Arial"/>
+              </a:rPr>
+              <a:t>mo</a:t>
+            </a:r>
+            <a:r>
+              <a:rPr sz="1350" b="0" i="0" dirty="0">
+                <a:solidFill>
+                  <a:srgbClr val="1F2D2D"/>
+                </a:solidFill>
+                <a:latin typeface="Arial"/>
+              </a:rPr>
+              <a:t>) salvage volume, quality-</a:t>
+            </a:r>
+            <a:r>
+              <a:rPr sz="1350" b="0" i="0" dirty="0" err="1">
+                <a:solidFill>
+                  <a:srgbClr val="1F2D2D"/>
+                </a:solidFill>
+                <a:latin typeface="Arial"/>
+              </a:rPr>
+              <a:t>penalised</a:t>
+            </a:r>
+            <a:r>
+              <a:rPr sz="1350" b="0" i="0" dirty="0">
+                <a:solidFill>
+                  <a:srgbClr val="1F2D2D"/>
+                </a:solidFill>
+                <a:latin typeface="Arial"/>
+              </a:rPr>
+              <a:t> (blue-stain, moisture, LHV −10…−25%).</a:t>
             </a:r>
           </a:p>
           <a:p>
@@ -4022,7 +4146,7 @@
               </a:spcAft>
             </a:pPr>
             <a:r>
-              <a:rPr sz="1350" b="1" i="0">
+              <a:rPr sz="1350" b="1" i="0" dirty="0">
                 <a:solidFill>
                   <a:srgbClr val="5A6363"/>
                 </a:solidFill>
@@ -4031,7 +4155,7 @@
               <a:t>·   </a:t>
             </a:r>
             <a:r>
-              <a:rPr sz="1350" b="1" i="0">
+              <a:rPr sz="1350" b="1" i="0" dirty="0">
                 <a:solidFill>
                   <a:srgbClr val="1F2D2D"/>
                 </a:solidFill>
@@ -4040,7 +4164,7 @@
               <a:t>Structural supply deficit</a:t>
             </a:r>
             <a:r>
-              <a:rPr sz="1350" b="0" i="0">
+              <a:rPr sz="1350" b="0" i="0" dirty="0">
                 <a:solidFill>
                   <a:srgbClr val="1F2D2D"/>
                 </a:solidFill>
@@ -4056,7 +4180,7 @@
               </a:spcAft>
             </a:pPr>
             <a:r>
-              <a:rPr sz="1350" b="1" i="0">
+              <a:rPr sz="1350" b="1" i="0" dirty="0">
                 <a:solidFill>
                   <a:srgbClr val="5A6363"/>
                 </a:solidFill>
@@ -4065,7 +4189,7 @@
               <a:t>·   </a:t>
             </a:r>
             <a:r>
-              <a:rPr sz="1350" b="1" i="0">
+              <a:rPr sz="1350" b="1" i="0" dirty="0">
                 <a:solidFill>
                   <a:srgbClr val="1F2D2D"/>
                 </a:solidFill>
@@ -4074,7 +4198,7 @@
               <a:t>Sink loss</a:t>
             </a:r>
             <a:r>
-              <a:rPr sz="1350" b="0" i="0">
+              <a:rPr sz="1350" b="0" i="0" dirty="0">
                 <a:solidFill>
                   <a:srgbClr val="1F2D2D"/>
                 </a:solidFill>
@@ -4090,7 +4214,7 @@
               </a:spcAft>
             </a:pPr>
             <a:r>
-              <a:rPr sz="1350" b="1" i="0">
+              <a:rPr sz="1350" b="1" i="0" dirty="0">
                 <a:solidFill>
                   <a:srgbClr val="0E5A3E"/>
                 </a:solidFill>
@@ -4099,16 +4223,25 @@
               <a:t>—  </a:t>
             </a:r>
             <a:r>
-              <a:rPr sz="1350" b="1" i="0">
-                <a:solidFill>
-                  <a:srgbClr val="1F2D2D"/>
-                </a:solidFill>
-                <a:latin typeface="Arial"/>
-              </a:rPr>
-              <a:t>Energy-system response studied as a pre-shock → post-shock pair with constrained re-optimisation</a:t>
-            </a:r>
-            <a:r>
-              <a:rPr sz="1350" b="0" i="0">
+              <a:rPr sz="1350" b="1" i="0" dirty="0">
+                <a:solidFill>
+                  <a:srgbClr val="1F2D2D"/>
+                </a:solidFill>
+                <a:latin typeface="Arial"/>
+              </a:rPr>
+              <a:t>Energy-system response studied as a pre-shock → post-shock pair with constrained re-</a:t>
+            </a:r>
+            <a:r>
+              <a:rPr sz="1350" b="1" i="0" dirty="0" err="1">
+                <a:solidFill>
+                  <a:srgbClr val="1F2D2D"/>
+                </a:solidFill>
+                <a:latin typeface="Arial"/>
+              </a:rPr>
+              <a:t>optimisation</a:t>
+            </a:r>
+            <a:r>
+              <a:rPr sz="1350" b="0" i="0" dirty="0">
                 <a:solidFill>
                   <a:srgbClr val="1F2D2D"/>
                 </a:solidFill>
@@ -4116,6 +4249,73 @@
               </a:rPr>
               <a:t> (inherited lower bounds on installed capacity) to expose stranded-asset and transition-delay risk.</a:t>
             </a:r>
+            <a:endParaRPr lang="it-IT" sz="1350" b="0" i="0" dirty="0">
+              <a:solidFill>
+                <a:srgbClr val="1F2D2D"/>
+              </a:solidFill>
+              <a:latin typeface="Arial"/>
+            </a:endParaRPr>
+          </a:p>
+          <a:p>
+            <a:pPr>
+              <a:spcAft>
+                <a:spcPts val="800"/>
+              </a:spcAft>
+            </a:pPr>
+            <a:endParaRPr lang="en-US" sz="1350" dirty="0">
+              <a:solidFill>
+                <a:srgbClr val="1F2D2D"/>
+              </a:solidFill>
+              <a:latin typeface="Arial"/>
+            </a:endParaRPr>
+          </a:p>
+          <a:p>
+            <a:pPr>
+              <a:spcAft>
+                <a:spcPts val="800"/>
+              </a:spcAft>
+            </a:pPr>
+            <a:endParaRPr lang="en-US" sz="1350" b="0" i="0" dirty="0">
+              <a:solidFill>
+                <a:srgbClr val="1F2D2D"/>
+              </a:solidFill>
+              <a:latin typeface="Arial"/>
+            </a:endParaRPr>
+          </a:p>
+          <a:p>
+            <a:pPr>
+              <a:spcAft>
+                <a:spcPts val="800"/>
+              </a:spcAft>
+            </a:pPr>
+            <a:endParaRPr lang="en-US" sz="1350" dirty="0">
+              <a:solidFill>
+                <a:srgbClr val="1F2D2D"/>
+              </a:solidFill>
+              <a:latin typeface="Arial"/>
+            </a:endParaRPr>
+          </a:p>
+          <a:p>
+            <a:pPr>
+              <a:spcAft>
+                <a:spcPts val="800"/>
+              </a:spcAft>
+            </a:pPr>
+            <a:r>
+              <a:rPr lang="en-US" sz="1350" b="0" i="0" dirty="0">
+                <a:solidFill>
+                  <a:srgbClr val="1F2D2D"/>
+                </a:solidFill>
+                <a:latin typeface="Arial"/>
+              </a:rPr>
+              <a:t>													quid technological capacity and supply curves ? </a:t>
+            </a:r>
+            <a:endParaRPr sz="1350" b="0" i="0" dirty="0">
+              <a:solidFill>
+                <a:srgbClr val="1F2D2D"/>
+              </a:solidFill>
+              <a:latin typeface="Arial"/>
+            </a:endParaRPr>
           </a:p>
         </p:txBody>
       </p:sp>
@@ -4185,6 +4385,80 @@
               </a:rPr>
               <a:t>10</a:t>
             </a:r>
+          </a:p>
+        </p:txBody>
+      </p:sp>
+      <p:pic>
+        <p:nvPicPr>
+          <p:cNvPr id="9" name="Picture 8" descr="biomass_supply_curves_fi_2035.png">
+            <a:extLst>
+              <a:ext uri="{FF2B5EF4-FFF2-40B4-BE49-F238E27FC236}">
+                <a16:creationId xmlns:a16="http://schemas.microsoft.com/office/drawing/2014/main" id="{0726D73A-C3E8-3475-DDBD-D3B47D3B7131}"/>
+              </a:ext>
+            </a:extLst>
+          </p:cNvPr>
+          <p:cNvPicPr>
+            <a:picLocks noChangeAspect="1"/>
+          </p:cNvPicPr>
+          <p:nvPr/>
+        </p:nvPicPr>
+        <p:blipFill>
+          <a:blip r:embed="rId2"/>
+          <a:stretch>
+            <a:fillRect/>
+          </a:stretch>
+        </p:blipFill>
+        <p:spPr>
+          <a:xfrm>
+            <a:off x="778719" y="3842526"/>
+            <a:ext cx="4210334" cy="2139224"/>
+          </a:xfrm>
+          <a:prstGeom prst="rect">
+            <a:avLst/>
+          </a:prstGeom>
+        </p:spPr>
+      </p:pic>
+      <p:sp>
+        <p:nvSpPr>
+          <p:cNvPr id="10" name="Right Brace 9">
+            <a:extLst>
+              <a:ext uri="{FF2B5EF4-FFF2-40B4-BE49-F238E27FC236}">
+                <a16:creationId xmlns:a16="http://schemas.microsoft.com/office/drawing/2014/main" id="{9A8DC55C-A89B-763A-D59A-7C77665F8F49}"/>
+              </a:ext>
+            </a:extLst>
+          </p:cNvPr>
+          <p:cNvSpPr/>
+          <p:nvPr/>
+        </p:nvSpPr>
+        <p:spPr>
+          <a:xfrm rot="2702882">
+            <a:off x="3466532" y="4492277"/>
+            <a:ext cx="375313" cy="1282889"/>
+          </a:xfrm>
+          <a:prstGeom prst="rightBrace">
+            <a:avLst/>
+          </a:prstGeom>
+        </p:spPr>
+        <p:style>
+          <a:lnRef idx="3">
+            <a:schemeClr val="accent1"/>
+          </a:lnRef>
+          <a:fillRef idx="0">
+            <a:schemeClr val="accent1"/>
+          </a:fillRef>
+          <a:effectRef idx="2">
+            <a:schemeClr val="accent1"/>
+          </a:effectRef>
+          <a:fontRef idx="minor">
+            <a:schemeClr val="tx1"/>
+          </a:fontRef>
+        </p:style>
+        <p:txBody>
+          <a:bodyPr rtlCol="0" anchor="ctr"/>
+          <a:lstStyle/>
+          <a:p>
+            <a:pPr algn="ctr"/>
+            <a:endParaRPr lang="en-US" dirty="0"/>
           </a:p>
         </p:txBody>
       </p:sp>
@@ -5248,7 +5522,7 @@
                 </a:solidFill>
                 <a:latin typeface="Arial"/>
               </a:rPr>
-              <a:t>THE IIASA MODEL LANDSCAPE</a:t>
+              <a:t>OPEN QUESTIONS FOR IIASA</a:t>
             </a:r>
           </a:p>
           <a:p>
@@ -5259,489 +5533,21 @@
                 </a:solidFill>
                 <a:latin typeface="Arial"/>
               </a:rPr>
-              <a:t>What each tool does — and the key caveat for us</a:t>
-            </a:r>
-          </a:p>
-        </p:txBody>
-      </p:sp>
-      <p:graphicFrame>
-        <p:nvGraphicFramePr>
-          <p:cNvPr id="5" name="Table 4"/>
-          <p:cNvGraphicFramePr>
-            <a:graphicFrameLocks noGrp="1"/>
-          </p:cNvGraphicFramePr>
-          <p:nvPr/>
-        </p:nvGraphicFramePr>
-        <p:xfrm>
-          <a:off x="457200" y="1371600"/>
-          <a:ext cx="11274552" cy="4572000"/>
-        </p:xfrm>
-        <a:graphic>
-          <a:graphicData uri="http://schemas.openxmlformats.org/drawingml/2006/table">
-            <a:tbl>
-              <a:tblPr firstRow="1" bandRow="1">
-                <a:tableStyleId>{5C22544A-7EE6-4342-B048-85BDC9FD1C3A}</a:tableStyleId>
-              </a:tblPr>
-              <a:tblGrid>
-                <a:gridCol w="1828800">
-                  <a:extLst>
-                    <a:ext uri="{9D8B030D-6E8A-4147-A177-3AD203B41FA5}">
-                      <a16:colId xmlns:a16="http://schemas.microsoft.com/office/drawing/2014/main" val="20000"/>
-                    </a:ext>
-                  </a:extLst>
-                </a:gridCol>
-                <a:gridCol w="4663440">
-                  <a:extLst>
-                    <a:ext uri="{9D8B030D-6E8A-4147-A177-3AD203B41FA5}">
-                      <a16:colId xmlns:a16="http://schemas.microsoft.com/office/drawing/2014/main" val="20001"/>
-                    </a:ext>
-                  </a:extLst>
-                </a:gridCol>
-                <a:gridCol w="4782312">
-                  <a:extLst>
-                    <a:ext uri="{9D8B030D-6E8A-4147-A177-3AD203B41FA5}">
-                      <a16:colId xmlns:a16="http://schemas.microsoft.com/office/drawing/2014/main" val="20002"/>
-                    </a:ext>
-                  </a:extLst>
-                </a:gridCol>
-              </a:tblGrid>
-              <a:tr h="762000">
-                <a:tc>
-                  <a:txBody>
-                    <a:bodyPr/>
-                    <a:lstStyle/>
-                    <a:p>
-                      <a:r>
-                        <a:rPr sz="1150" b="1">
-                          <a:solidFill>
-                            <a:srgbClr val="FFFFFF"/>
-                          </a:solidFill>
-                          <a:latin typeface="Arial"/>
-                        </a:rPr>
-                        <a:t>Model</a:t>
-                      </a:r>
-                    </a:p>
-                  </a:txBody>
-                  <a:tcPr>
-                    <a:solidFill>
-                      <a:srgbClr val="158158"/>
-                    </a:solidFill>
-                  </a:tcPr>
-                </a:tc>
-                <a:tc>
-                  <a:txBody>
-                    <a:bodyPr/>
-                    <a:lstStyle/>
-                    <a:p>
-                      <a:r>
-                        <a:rPr sz="1150" b="1">
-                          <a:solidFill>
-                            <a:srgbClr val="FFFFFF"/>
-                          </a:solidFill>
-                          <a:latin typeface="Arial"/>
-                        </a:rPr>
-                        <a:t>What it does</a:t>
-                      </a:r>
-                    </a:p>
-                  </a:txBody>
-                  <a:tcPr>
-                    <a:solidFill>
-                      <a:srgbClr val="158158"/>
-                    </a:solidFill>
-                  </a:tcPr>
-                </a:tc>
-                <a:tc>
-                  <a:txBody>
-                    <a:bodyPr/>
-                    <a:lstStyle/>
-                    <a:p>
-                      <a:r>
-                        <a:rPr sz="1150" b="1">
-                          <a:solidFill>
-                            <a:srgbClr val="FFFFFF"/>
-                          </a:solidFill>
-                          <a:latin typeface="Arial"/>
-                        </a:rPr>
-                        <a:t>Key caveat for this coupling</a:t>
-                      </a:r>
-                    </a:p>
-                  </a:txBody>
-                  <a:tcPr>
-                    <a:solidFill>
-                      <a:srgbClr val="158158"/>
-                    </a:solidFill>
-                  </a:tcPr>
-                </a:tc>
-                <a:extLst>
-                  <a:ext uri="{0D108BD9-81ED-4DB2-BD59-A6C34878D82A}">
-                    <a16:rowId xmlns:a16="http://schemas.microsoft.com/office/drawing/2014/main" val="10000"/>
-                  </a:ext>
-                </a:extLst>
-              </a:tr>
-              <a:tr h="762000">
-                <a:tc>
-                  <a:txBody>
-                    <a:bodyPr/>
-                    <a:lstStyle/>
-                    <a:p>
-                      <a:r>
-                        <a:rPr sz="1050" b="1">
-                          <a:solidFill>
-                            <a:srgbClr val="0E5A3E"/>
-                          </a:solidFill>
-                          <a:latin typeface="Arial"/>
-                        </a:rPr>
-                        <a:t>G4M</a:t>
-                      </a:r>
-                    </a:p>
-                  </a:txBody>
-                  <a:tcPr marL="63500" marT="25400" marB="25400">
-                    <a:solidFill>
-                      <a:srgbClr val="FFFFFF"/>
-                    </a:solidFill>
-                  </a:tcPr>
-                </a:tc>
-                <a:tc>
-                  <a:txBody>
-                    <a:bodyPr/>
-                    <a:lstStyle/>
-                    <a:p>
-                      <a:r>
-                        <a:rPr sz="1050">
-                          <a:latin typeface="Arial"/>
-                        </a:rPr>
-                        <a:t>Geographically explicit economic forest model (NPV). Afforest/deforest/manage from wood prices; harvest, carbon pools, LULUCF flux.</a:t>
-                      </a:r>
-                    </a:p>
-                  </a:txBody>
-                  <a:tcPr marL="63500" marT="25400" marB="25400">
-                    <a:solidFill>
-                      <a:srgbClr val="FFFFFF"/>
-                    </a:solidFill>
-                  </a:tcPr>
-                </a:tc>
-                <a:tc>
-                  <a:txBody>
-                    <a:bodyPr/>
-                    <a:lstStyle/>
-                    <a:p>
-                      <a:r>
-                        <a:rPr sz="1050">
-                          <a:solidFill>
-                            <a:srgbClr val="8A5508"/>
-                          </a:solidFill>
-                          <a:latin typeface="Arial"/>
-                        </a:rPr>
-                        <a:t>Assortment split lives in GLOBIOM, not G4M. 0.5° / SimU — Finland resolved as a country but reported EU-27. No deadwood pool found.</a:t>
-                      </a:r>
-                    </a:p>
-                  </a:txBody>
-                  <a:tcPr marL="63500" marT="25400" marB="25400">
-                    <a:solidFill>
-                      <a:srgbClr val="FFFFFF"/>
-                    </a:solidFill>
-                  </a:tcPr>
-                </a:tc>
-                <a:extLst>
-                  <a:ext uri="{0D108BD9-81ED-4DB2-BD59-A6C34878D82A}">
-                    <a16:rowId xmlns:a16="http://schemas.microsoft.com/office/drawing/2014/main" val="10001"/>
-                  </a:ext>
-                </a:extLst>
-              </a:tr>
-              <a:tr h="762000">
-                <a:tc>
-                  <a:txBody>
-                    <a:bodyPr/>
-                    <a:lstStyle/>
-                    <a:p>
-                      <a:r>
-                        <a:rPr sz="1050" b="1">
-                          <a:solidFill>
-                            <a:srgbClr val="0E5A3E"/>
-                          </a:solidFill>
-                          <a:latin typeface="Arial"/>
-                        </a:rPr>
-                        <a:t>PICUS / PREBAS</a:t>
-                      </a:r>
-                    </a:p>
-                  </a:txBody>
-                  <a:tcPr marL="63500" marT="25400" marB="25400">
-                    <a:solidFill>
-                      <a:srgbClr val="F3F6F4"/>
-                    </a:solidFill>
-                  </a:tcPr>
-                </a:tc>
-                <a:tc>
-                  <a:txBody>
-                    <a:bodyPr/>
-                    <a:lstStyle/>
-                    <a:p>
-                      <a:r>
-                        <a:rPr sz="1050">
-                          <a:latin typeface="Arial"/>
-                        </a:rPr>
-                        <a:t>Stand/patch growth models with disturbance modules.</a:t>
-                      </a:r>
-                    </a:p>
-                  </a:txBody>
-                  <a:tcPr marL="63500" marT="25400" marB="25400">
-                    <a:solidFill>
-                      <a:srgbClr val="F3F6F4"/>
-                    </a:solidFill>
-                  </a:tcPr>
-                </a:tc>
-                <a:tc>
-                  <a:txBody>
-                    <a:bodyPr/>
-                    <a:lstStyle/>
-                    <a:p>
-                      <a:r>
-                        <a:rPr sz="1050">
-                          <a:solidFill>
-                            <a:srgbClr val="8A5508"/>
-                          </a:solidFill>
-                          <a:latin typeface="Arial"/>
-                        </a:rPr>
-                        <a:t>In ForestNavigator the native PICUS disturbance modules were off; for Northern Europe the growth model is PREBAS — clarify which underlies Finland.</a:t>
-                      </a:r>
-                    </a:p>
-                  </a:txBody>
-                  <a:tcPr marL="63500" marT="25400" marB="25400">
-                    <a:solidFill>
-                      <a:srgbClr val="F3F6F4"/>
-                    </a:solidFill>
-                  </a:tcPr>
-                </a:tc>
-                <a:extLst>
-                  <a:ext uri="{0D108BD9-81ED-4DB2-BD59-A6C34878D82A}">
-                    <a16:rowId xmlns:a16="http://schemas.microsoft.com/office/drawing/2014/main" val="10002"/>
-                  </a:ext>
-                </a:extLst>
-              </a:tr>
-              <a:tr h="762000">
-                <a:tc>
-                  <a:txBody>
-                    <a:bodyPr/>
-                    <a:lstStyle/>
-                    <a:p>
-                      <a:r>
-                        <a:rPr sz="1050" b="1">
-                          <a:solidFill>
-                            <a:srgbClr val="0E5A3E"/>
-                          </a:solidFill>
-                          <a:latin typeface="Arial"/>
-                        </a:rPr>
-                        <a:t>FLAM</a:t>
-                      </a:r>
-                    </a:p>
-                  </a:txBody>
-                  <a:tcPr marL="63500" marT="25400" marB="25400">
-                    <a:solidFill>
-                      <a:srgbClr val="FFFFFF"/>
-                    </a:solidFill>
-                  </a:tcPr>
-                </a:tc>
-                <a:tc>
-                  <a:txBody>
-                    <a:bodyPr/>
-                    <a:lstStyle/>
-                    <a:p>
-                      <a:r>
-                        <a:rPr sz="1050">
-                          <a:latin typeface="Arial"/>
-                        </a:rPr>
-                        <a:t>Process-based daily wildfire model (burned area).</a:t>
-                      </a:r>
-                    </a:p>
-                  </a:txBody>
-                  <a:tcPr marL="63500" marT="25400" marB="25400">
-                    <a:solidFill>
-                      <a:srgbClr val="FFFFFF"/>
-                    </a:solidFill>
-                  </a:tcPr>
-                </a:tc>
-                <a:tc>
-                  <a:txBody>
-                    <a:bodyPr/>
-                    <a:lstStyle/>
-                    <a:p>
-                      <a:r>
-                        <a:rPr sz="1050">
-                          <a:solidFill>
-                            <a:srgbClr val="8A5508"/>
-                          </a:solidFill>
-                          <a:latin typeface="Arial"/>
-                        </a:rPr>
-                        <a:t>No Finland application yet (closest: Sweden 2022). Wildfire is secondary for Finland — treat as sensitivity.</a:t>
-                      </a:r>
-                    </a:p>
-                  </a:txBody>
-                  <a:tcPr marL="63500" marT="25400" marB="25400">
-                    <a:solidFill>
-                      <a:srgbClr val="FFFFFF"/>
-                    </a:solidFill>
-                  </a:tcPr>
-                </a:tc>
-                <a:extLst>
-                  <a:ext uri="{0D108BD9-81ED-4DB2-BD59-A6C34878D82A}">
-                    <a16:rowId xmlns:a16="http://schemas.microsoft.com/office/drawing/2014/main" val="10003"/>
-                  </a:ext>
-                </a:extLst>
-              </a:tr>
-              <a:tr h="762000">
-                <a:tc>
-                  <a:txBody>
-                    <a:bodyPr/>
-                    <a:lstStyle/>
-                    <a:p>
-                      <a:r>
-                        <a:rPr sz="1050" b="1">
-                          <a:solidFill>
-                            <a:srgbClr val="0E5A3E"/>
-                          </a:solidFill>
-                          <a:latin typeface="Arial"/>
-                        </a:rPr>
-                        <a:t>BeWhere</a:t>
-                      </a:r>
-                    </a:p>
-                  </a:txBody>
-                  <a:tcPr marL="63500" marT="25400" marB="25400">
-                    <a:solidFill>
-                      <a:srgbClr val="F3F6F4"/>
-                    </a:solidFill>
-                  </a:tcPr>
-                </a:tc>
-                <a:tc>
-                  <a:txBody>
-                    <a:bodyPr/>
-                    <a:lstStyle/>
-                    <a:p>
-                      <a:r>
-                        <a:rPr sz="1050">
-                          <a:latin typeface="Arial"/>
-                        </a:rPr>
-                        <a:t>Spatially explicit MILP for biomass supply chains and plant siting.</a:t>
-                      </a:r>
-                    </a:p>
-                  </a:txBody>
-                  <a:tcPr marL="63500" marT="25400" marB="25400">
-                    <a:solidFill>
-                      <a:srgbClr val="F3F6F4"/>
-                    </a:solidFill>
-                  </a:tcPr>
-                </a:tc>
-                <a:tc>
-                  <a:txBody>
-                    <a:bodyPr/>
-                    <a:lstStyle/>
-                    <a:p>
-                      <a:r>
-                        <a:rPr sz="1050">
-                          <a:solidFill>
-                            <a:srgbClr val="8A5508"/>
-                          </a:solidFill>
-                          <a:latin typeface="Arial"/>
-                        </a:rPr>
-                        <a:t>Finland precedent exists (Natarajan 2014). No Schipfer HWP/construction paper located — ask directly.</a:t>
-                      </a:r>
-                    </a:p>
-                  </a:txBody>
-                  <a:tcPr marL="63500" marT="25400" marB="25400">
-                    <a:solidFill>
-                      <a:srgbClr val="F3F6F4"/>
-                    </a:solidFill>
-                  </a:tcPr>
-                </a:tc>
-                <a:extLst>
-                  <a:ext uri="{0D108BD9-81ED-4DB2-BD59-A6C34878D82A}">
-                    <a16:rowId xmlns:a16="http://schemas.microsoft.com/office/drawing/2014/main" val="10004"/>
-                  </a:ext>
-                </a:extLst>
-              </a:tr>
-              <a:tr h="762000">
-                <a:tc>
-                  <a:txBody>
-                    <a:bodyPr/>
-                    <a:lstStyle/>
-                    <a:p>
-                      <a:r>
-                        <a:rPr sz="1050" b="1">
-                          <a:solidFill>
-                            <a:srgbClr val="0E5A3E"/>
-                          </a:solidFill>
-                          <a:latin typeface="Arial"/>
-                        </a:rPr>
-                        <a:t>ForestNavigator D3.4</a:t>
-                      </a:r>
-                    </a:p>
-                  </a:txBody>
-                  <a:tcPr marL="63500" marT="25400" marB="25400">
-                    <a:solidFill>
-                      <a:srgbClr val="FFFFFF"/>
-                    </a:solidFill>
-                  </a:tcPr>
-                </a:tc>
-                <a:tc>
-                  <a:txBody>
-                    <a:bodyPr/>
-                    <a:lstStyle/>
-                    <a:p>
-                      <a:r>
-                        <a:rPr sz="1050">
-                          <a:latin typeface="Arial"/>
-                        </a:rPr>
-                        <a:t>FLAM + G4M + PICUS-derived beetle/wind, 5 arc-min over EU-27 incl. Finland.</a:t>
-                      </a:r>
-                    </a:p>
-                  </a:txBody>
-                  <a:tcPr marL="63500" marT="25400" marB="25400">
-                    <a:solidFill>
-                      <a:srgbClr val="FFFFFF"/>
-                    </a:solidFill>
-                  </a:tcPr>
-                </a:tc>
-                <a:tc>
-                  <a:txBody>
-                    <a:bodyPr/>
-                    <a:lstStyle/>
-                    <a:p>
-                      <a:r>
-                        <a:rPr sz="1050">
-                          <a:solidFill>
-                            <a:srgbClr val="8A5508"/>
-                          </a:solidFill>
-                          <a:latin typeface="Arial"/>
-                        </a:rPr>
-                        <a:t>Disturbances modelled as biomass loss only — salvage-wood recovery NOT yet implemented. The ready-made disturbance curve does not exist yet.</a:t>
-                      </a:r>
-                    </a:p>
-                  </a:txBody>
-                  <a:tcPr marL="63500" marT="25400" marB="25400">
-                    <a:solidFill>
-                      <a:srgbClr val="FFFFFF"/>
-                    </a:solidFill>
-                  </a:tcPr>
-                </a:tc>
-                <a:extLst>
-                  <a:ext uri="{0D108BD9-81ED-4DB2-BD59-A6C34878D82A}">
-                    <a16:rowId xmlns:a16="http://schemas.microsoft.com/office/drawing/2014/main" val="10005"/>
-                  </a:ext>
-                </a:extLst>
-              </a:tr>
-            </a:tbl>
-          </a:graphicData>
-        </a:graphic>
-      </p:graphicFrame>
-      <p:sp>
-        <p:nvSpPr>
-          <p:cNvPr id="6" name="TextBox 5"/>
+              <a:t>What we need to settle today</a:t>
+            </a:r>
+          </a:p>
+        </p:txBody>
+      </p:sp>
+      <p:sp>
+        <p:nvSpPr>
+          <p:cNvPr id="5" name="TextBox 4"/>
           <p:cNvSpPr txBox="1"/>
           <p:nvPr/>
         </p:nvSpPr>
         <p:spPr>
           <a:xfrm>
-            <a:off x="457200" y="6428232"/>
-            <a:ext cx="8229600" cy="320040"/>
+            <a:off x="640080" y="1371600"/>
+            <a:ext cx="11064240" cy="4937760"/>
           </a:xfrm>
           <a:prstGeom prst="rect">
             <a:avLst/>
@@ -5754,28 +5560,217 @@
           </a:bodyPr>
           <a:lstStyle/>
           <a:p>
-            <a:r>
-              <a:rPr sz="850" b="0" i="0">
-                <a:solidFill>
-                  <a:srgbClr val="5A6363"/>
-                </a:solidFill>
-                <a:latin typeface="Arial"/>
-              </a:rPr>
-              <a:t>M. Bordenave · Forest–Energy coupling for Finland · IIASA meeting, 9 Oct 2026</a:t>
-            </a:r>
-          </a:p>
-        </p:txBody>
-      </p:sp>
-      <p:sp>
-        <p:nvSpPr>
-          <p:cNvPr id="7" name="TextBox 6"/>
+            <a:pPr>
+              <a:spcAft>
+                <a:spcPts val="700"/>
+              </a:spcAft>
+            </a:pPr>
+            <a:r>
+              <a:rPr sz="1300" b="1" i="0">
+                <a:solidFill>
+                  <a:srgbClr val="0E5A3E"/>
+                </a:solidFill>
+                <a:latin typeface="Arial"/>
+              </a:rPr>
+              <a:t>Q1.  </a:t>
+            </a:r>
+            <a:r>
+              <a:rPr sz="1250" b="0" i="0">
+                <a:solidFill>
+                  <a:srgbClr val="1F2D2D"/>
+                </a:solidFill>
+                <a:latin typeface="Arial"/>
+              </a:rPr>
+              <a:t>Does G4M run for Finland at a resolution usable for national supply curves, and output assortment-level harvest + net carbon/HWP flux per management scenario? G4M alone, or via GLOBIOM?</a:t>
+            </a:r>
+          </a:p>
+          <a:p>
+            <a:pPr>
+              <a:spcAft>
+                <a:spcPts val="700"/>
+              </a:spcAft>
+            </a:pPr>
+            <a:r>
+              <a:rPr sz="1300" b="1" i="0">
+                <a:solidFill>
+                  <a:srgbClr val="0E5A3E"/>
+                </a:solidFill>
+                <a:latin typeface="Arial"/>
+              </a:rPr>
+              <a:t>Q2.  </a:t>
+            </a:r>
+            <a:r>
+              <a:rPr sz="1250" b="0" i="0">
+                <a:solidFill>
+                  <a:srgbClr val="1F2D2D"/>
+                </a:solidFill>
+                <a:latin typeface="Arial"/>
+              </a:rPr>
+              <a:t>Does G4M output a separate, quantified deadwood carbon pool per scenario-year? (Needed for the sink term and the BDS narrative.)</a:t>
+            </a:r>
+          </a:p>
+          <a:p>
+            <a:pPr>
+              <a:spcAft>
+                <a:spcPts val="700"/>
+              </a:spcAft>
+            </a:pPr>
+            <a:r>
+              <a:rPr sz="1300" b="1" i="0">
+                <a:solidFill>
+                  <a:srgbClr val="0E5A3E"/>
+                </a:solidFill>
+                <a:latin typeface="Arial"/>
+              </a:rPr>
+              <a:t>Q3.  </a:t>
+            </a:r>
+            <a:r>
+              <a:rPr sz="1250" b="0" i="0">
+                <a:solidFill>
+                  <a:srgbClr val="1F2D2D"/>
+                </a:solidFill>
+                <a:latin typeface="Arial"/>
+              </a:rPr>
+              <a:t>How do you endogenise the industry-vs-energy split, so energy-available residue is what remains after industrial roundwood demand? What industrial-demand trajectory?</a:t>
+            </a:r>
+          </a:p>
+          <a:p>
+            <a:pPr>
+              <a:spcAft>
+                <a:spcPts val="700"/>
+              </a:spcAft>
+            </a:pPr>
+            <a:r>
+              <a:rPr sz="1300" b="1" i="0">
+                <a:solidFill>
+                  <a:srgbClr val="0E5A3E"/>
+                </a:solidFill>
+                <a:latin typeface="Arial"/>
+              </a:rPr>
+              <a:t>Q4.  </a:t>
+            </a:r>
+            <a:r>
+              <a:rPr sz="1250" b="0" i="0">
+                <a:solidFill>
+                  <a:srgbClr val="1F2D2D"/>
+                </a:solidFill>
+                <a:latin typeface="Arial"/>
+              </a:rPr>
+              <a:t>Are ecological availability fractions (deadwood/residue retention, set-aside) applied inside G4M per scenario, or must we post-apply them?</a:t>
+            </a:r>
+          </a:p>
+          <a:p>
+            <a:pPr>
+              <a:spcAft>
+                <a:spcPts val="700"/>
+              </a:spcAft>
+            </a:pPr>
+            <a:r>
+              <a:rPr sz="1300" b="1" i="0">
+                <a:solidFill>
+                  <a:srgbClr val="0E5A3E"/>
+                </a:solidFill>
+                <a:latin typeface="Arial"/>
+              </a:rPr>
+              <a:t>Q5.  </a:t>
+            </a:r>
+            <a:r>
+              <a:rPr sz="1250" b="0" i="0">
+                <a:solidFill>
+                  <a:srgbClr val="1F2D2D"/>
+                </a:solidFill>
+                <a:latin typeface="Arial"/>
+              </a:rPr>
+              <a:t>For Finland, is growth/disturbance driven by G4M, PREBAS, or PICUS in your setup?</a:t>
+            </a:r>
+          </a:p>
+          <a:p>
+            <a:pPr>
+              <a:spcAft>
+                <a:spcPts val="700"/>
+              </a:spcAft>
+            </a:pPr>
+            <a:r>
+              <a:rPr sz="1300" b="1" i="0">
+                <a:solidFill>
+                  <a:srgbClr val="0E5A3E"/>
+                </a:solidFill>
+                <a:latin typeface="Arial"/>
+              </a:rPr>
+              <a:t>Q6.  </a:t>
+            </a:r>
+            <a:r>
+              <a:rPr sz="1250" b="0" i="0">
+                <a:solidFill>
+                  <a:srgbClr val="1F2D2D"/>
+                </a:solidFill>
+                <a:latin typeface="Arial"/>
+              </a:rPr>
+              <a:t>D3.4 models disturbance as biomass loss only — is a salvage-wood recovery extension available or planned, or do we build the post-processing?</a:t>
+            </a:r>
+          </a:p>
+          <a:p>
+            <a:pPr>
+              <a:spcAft>
+                <a:spcPts val="700"/>
+              </a:spcAft>
+            </a:pPr>
+            <a:r>
+              <a:rPr sz="1300" b="1" i="0">
+                <a:solidFill>
+                  <a:srgbClr val="0E5A3E"/>
+                </a:solidFill>
+                <a:latin typeface="Arial"/>
+              </a:rPr>
+              <a:t>Q7.  </a:t>
+            </a:r>
+            <a:r>
+              <a:rPr sz="1250" b="0" i="0">
+                <a:solidFill>
+                  <a:srgbClr val="1F2D2D"/>
+                </a:solidFill>
+                <a:latin typeface="Arial"/>
+              </a:rPr>
+              <a:t>How should calamity-wood carbon be treated in Finland's LULUCF / forest reference level for the coupled GHG budget?</a:t>
+            </a:r>
+          </a:p>
+          <a:p>
+            <a:pPr>
+              <a:spcAft>
+                <a:spcPts val="700"/>
+              </a:spcAft>
+            </a:pPr>
+            <a:r>
+              <a:rPr sz="1300" b="1" i="0">
+                <a:solidFill>
+                  <a:srgbClr val="0E5A3E"/>
+                </a:solidFill>
+                <a:latin typeface="Arial"/>
+              </a:rPr>
+              <a:t>Q8.  </a:t>
+            </a:r>
+            <a:r>
+              <a:rPr sz="1250" b="0" i="0">
+                <a:solidFill>
+                  <a:srgbClr val="1F2D2D"/>
+                </a:solidFill>
+                <a:latin typeface="Arial"/>
+              </a:rPr>
+              <a:t>Is there a BeWhere capability for construction / HWP supply chains (Schipfer / Tiwari), and on what timeline?</a:t>
+            </a:r>
+          </a:p>
+        </p:txBody>
+      </p:sp>
+      <p:sp>
+        <p:nvSpPr>
+          <p:cNvPr id="6" name="TextBox 5"/>
           <p:cNvSpPr txBox="1"/>
           <p:nvPr/>
         </p:nvSpPr>
         <p:spPr>
           <a:xfrm>
-            <a:off x="11338560" y="6428232"/>
-            <a:ext cx="548640" cy="320040"/>
+            <a:off x="457200" y="6428232"/>
+            <a:ext cx="8229600" cy="320040"/>
           </a:xfrm>
           <a:prstGeom prst="rect">
             <a:avLst/>
@@ -5788,6 +5783,40 @@
           </a:bodyPr>
           <a:lstStyle/>
           <a:p>
+            <a:r>
+              <a:rPr sz="850" b="0" i="0">
+                <a:solidFill>
+                  <a:srgbClr val="5A6363"/>
+                </a:solidFill>
+                <a:latin typeface="Arial"/>
+              </a:rPr>
+              <a:t>M. Bordenave · Forest–Energy coupling for Finland · IIASA meeting, 9 Oct 2026</a:t>
+            </a:r>
+          </a:p>
+        </p:txBody>
+      </p:sp>
+      <p:sp>
+        <p:nvSpPr>
+          <p:cNvPr id="7" name="TextBox 6"/>
+          <p:cNvSpPr txBox="1"/>
+          <p:nvPr/>
+        </p:nvSpPr>
+        <p:spPr>
+          <a:xfrm>
+            <a:off x="11338560" y="6428232"/>
+            <a:ext cx="548640" cy="320040"/>
+          </a:xfrm>
+          <a:prstGeom prst="rect">
+            <a:avLst/>
+          </a:prstGeom>
+          <a:noFill/>
+        </p:spPr>
+        <p:txBody>
+          <a:bodyPr wrap="square">
+            <a:spAutoFit/>
+          </a:bodyPr>
+          <a:lstStyle/>
+          <a:p>
             <a:pPr algn="r"/>
             <a:r>
               <a:rPr sz="900" b="1" i="0">
@@ -5796,7 +5825,7 @@
                 </a:solidFill>
                 <a:latin typeface="Arial"/>
               </a:rPr>
-              <a:t>13</a:t>
+              <a:t>15</a:t>
             </a:r>
           </a:p>
         </p:txBody>
@@ -6187,657 +6216,6 @@
 </file>
 
 <file path=ppt/slides/slide16.xml><?xml version="1.0" encoding="utf-8"?>
-<p:sld xmlns:a="http://schemas.openxmlformats.org/drawingml/2006/main" xmlns:r="http://schemas.openxmlformats.org/officeDocument/2006/relationships" xmlns:p="http://schemas.openxmlformats.org/presentationml/2006/main">
-  <p:cSld>
-    <p:spTree>
-      <p:nvGrpSpPr>
-        <p:cNvPr id="1" name=""/>
-        <p:cNvGrpSpPr/>
-        <p:nvPr/>
-      </p:nvGrpSpPr>
-      <p:grpSpPr>
-        <a:xfrm>
-          <a:off x="0" y="0"/>
-          <a:ext cx="0" cy="0"/>
-          <a:chOff x="0" y="0"/>
-          <a:chExt cx="0" cy="0"/>
-        </a:xfrm>
-      </p:grpSpPr>
-      <p:sp>
-        <p:nvSpPr>
-          <p:cNvPr id="2" name="Rectangle 1"/>
-          <p:cNvSpPr/>
-          <p:nvPr/>
-        </p:nvSpPr>
-        <p:spPr>
-          <a:xfrm>
-            <a:off x="0" y="0"/>
-            <a:ext cx="12191695" cy="1051560"/>
-          </a:xfrm>
-          <a:prstGeom prst="rect">
-            <a:avLst/>
-          </a:prstGeom>
-          <a:solidFill>
-            <a:srgbClr val="158158"/>
-          </a:solidFill>
-          <a:ln>
-            <a:noFill/>
-          </a:ln>
-          <a:effectLst/>
-        </p:spPr>
-        <p:style>
-          <a:lnRef idx="1">
-            <a:schemeClr val="accent1"/>
-          </a:lnRef>
-          <a:fillRef idx="3">
-            <a:schemeClr val="accent1"/>
-          </a:fillRef>
-          <a:effectRef idx="2">
-            <a:schemeClr val="accent1"/>
-          </a:effectRef>
-          <a:fontRef idx="minor">
-            <a:schemeClr val="lt1"/>
-          </a:fontRef>
-        </p:style>
-        <p:txBody>
-          <a:bodyPr rtlCol="0" anchor="ctr"/>
-          <a:lstStyle/>
-          <a:p>
-            <a:pPr algn="ctr"/>
-            <a:endParaRPr/>
-          </a:p>
-        </p:txBody>
-      </p:sp>
-      <p:sp>
-        <p:nvSpPr>
-          <p:cNvPr id="3" name="Rectangle 2"/>
-          <p:cNvSpPr/>
-          <p:nvPr/>
-        </p:nvSpPr>
-        <p:spPr>
-          <a:xfrm>
-            <a:off x="0" y="1051560"/>
-            <a:ext cx="12191695" cy="54864"/>
-          </a:xfrm>
-          <a:prstGeom prst="rect">
-            <a:avLst/>
-          </a:prstGeom>
-          <a:solidFill>
-            <a:srgbClr val="50B432"/>
-          </a:solidFill>
-          <a:ln>
-            <a:noFill/>
-          </a:ln>
-          <a:effectLst/>
-        </p:spPr>
-        <p:style>
-          <a:lnRef idx="1">
-            <a:schemeClr val="accent1"/>
-          </a:lnRef>
-          <a:fillRef idx="3">
-            <a:schemeClr val="accent1"/>
-          </a:fillRef>
-          <a:effectRef idx="2">
-            <a:schemeClr val="accent1"/>
-          </a:effectRef>
-          <a:fontRef idx="minor">
-            <a:schemeClr val="lt1"/>
-          </a:fontRef>
-        </p:style>
-        <p:txBody>
-          <a:bodyPr rtlCol="0" anchor="ctr"/>
-          <a:lstStyle/>
-          <a:p>
-            <a:pPr algn="ctr"/>
-            <a:endParaRPr/>
-          </a:p>
-        </p:txBody>
-      </p:sp>
-      <p:sp>
-        <p:nvSpPr>
-          <p:cNvPr id="4" name="TextBox 3"/>
-          <p:cNvSpPr txBox="1"/>
-          <p:nvPr/>
-        </p:nvSpPr>
-        <p:spPr>
-          <a:xfrm>
-            <a:off x="502920" y="109728"/>
-            <a:ext cx="11155680" cy="914400"/>
-          </a:xfrm>
-          <a:prstGeom prst="rect">
-            <a:avLst/>
-          </a:prstGeom>
-          <a:noFill/>
-        </p:spPr>
-        <p:txBody>
-          <a:bodyPr wrap="square">
-            <a:spAutoFit/>
-          </a:bodyPr>
-          <a:lstStyle/>
-          <a:p>
-            <a:r>
-              <a:rPr sz="1100" b="1" i="0">
-                <a:solidFill>
-                  <a:srgbClr val="C9E8D6"/>
-                </a:solidFill>
-                <a:latin typeface="Arial"/>
-              </a:rPr>
-              <a:t>OPEN QUESTIONS FOR IIASA</a:t>
-            </a:r>
-          </a:p>
-          <a:p>
-            <a:r>
-              <a:rPr sz="2400" b="1" i="0">
-                <a:solidFill>
-                  <a:srgbClr val="FFFFFF"/>
-                </a:solidFill>
-                <a:latin typeface="Arial"/>
-              </a:rPr>
-              <a:t>What we need to settle today</a:t>
-            </a:r>
-          </a:p>
-        </p:txBody>
-      </p:sp>
-      <p:sp>
-        <p:nvSpPr>
-          <p:cNvPr id="5" name="TextBox 4"/>
-          <p:cNvSpPr txBox="1"/>
-          <p:nvPr/>
-        </p:nvSpPr>
-        <p:spPr>
-          <a:xfrm>
-            <a:off x="640080" y="1371600"/>
-            <a:ext cx="11064240" cy="4937760"/>
-          </a:xfrm>
-          <a:prstGeom prst="rect">
-            <a:avLst/>
-          </a:prstGeom>
-          <a:noFill/>
-        </p:spPr>
-        <p:txBody>
-          <a:bodyPr wrap="square">
-            <a:spAutoFit/>
-          </a:bodyPr>
-          <a:lstStyle/>
-          <a:p>
-            <a:pPr>
-              <a:spcAft>
-                <a:spcPts val="700"/>
-              </a:spcAft>
-            </a:pPr>
-            <a:r>
-              <a:rPr sz="1300" b="1" i="0">
-                <a:solidFill>
-                  <a:srgbClr val="0E5A3E"/>
-                </a:solidFill>
-                <a:latin typeface="Arial"/>
-              </a:rPr>
-              <a:t>Q1.  </a:t>
-            </a:r>
-            <a:r>
-              <a:rPr sz="1250" b="0" i="0">
-                <a:solidFill>
-                  <a:srgbClr val="1F2D2D"/>
-                </a:solidFill>
-                <a:latin typeface="Arial"/>
-              </a:rPr>
-              <a:t>Does G4M run for Finland at a resolution usable for national supply curves, and output assortment-level harvest + net carbon/HWP flux per management scenario? G4M alone, or via GLOBIOM?</a:t>
-            </a:r>
-          </a:p>
-          <a:p>
-            <a:pPr>
-              <a:spcAft>
-                <a:spcPts val="700"/>
-              </a:spcAft>
-            </a:pPr>
-            <a:r>
-              <a:rPr sz="1300" b="1" i="0">
-                <a:solidFill>
-                  <a:srgbClr val="0E5A3E"/>
-                </a:solidFill>
-                <a:latin typeface="Arial"/>
-              </a:rPr>
-              <a:t>Q2.  </a:t>
-            </a:r>
-            <a:r>
-              <a:rPr sz="1250" b="0" i="0">
-                <a:solidFill>
-                  <a:srgbClr val="1F2D2D"/>
-                </a:solidFill>
-                <a:latin typeface="Arial"/>
-              </a:rPr>
-              <a:t>Does G4M output a separate, quantified deadwood carbon pool per scenario-year? (Needed for the sink term and the BDS narrative.)</a:t>
-            </a:r>
-          </a:p>
-          <a:p>
-            <a:pPr>
-              <a:spcAft>
-                <a:spcPts val="700"/>
-              </a:spcAft>
-            </a:pPr>
-            <a:r>
-              <a:rPr sz="1300" b="1" i="0">
-                <a:solidFill>
-                  <a:srgbClr val="0E5A3E"/>
-                </a:solidFill>
-                <a:latin typeface="Arial"/>
-              </a:rPr>
-              <a:t>Q3.  </a:t>
-            </a:r>
-            <a:r>
-              <a:rPr sz="1250" b="0" i="0">
-                <a:solidFill>
-                  <a:srgbClr val="1F2D2D"/>
-                </a:solidFill>
-                <a:latin typeface="Arial"/>
-              </a:rPr>
-              <a:t>How do you endogenise the industry-vs-energy split, so energy-available residue is what remains after industrial roundwood demand? What industrial-demand trajectory?</a:t>
-            </a:r>
-          </a:p>
-          <a:p>
-            <a:pPr>
-              <a:spcAft>
-                <a:spcPts val="700"/>
-              </a:spcAft>
-            </a:pPr>
-            <a:r>
-              <a:rPr sz="1300" b="1" i="0">
-                <a:solidFill>
-                  <a:srgbClr val="0E5A3E"/>
-                </a:solidFill>
-                <a:latin typeface="Arial"/>
-              </a:rPr>
-              <a:t>Q4.  </a:t>
-            </a:r>
-            <a:r>
-              <a:rPr sz="1250" b="0" i="0">
-                <a:solidFill>
-                  <a:srgbClr val="1F2D2D"/>
-                </a:solidFill>
-                <a:latin typeface="Arial"/>
-              </a:rPr>
-              <a:t>Are ecological availability fractions (deadwood/residue retention, set-aside) applied inside G4M per scenario, or must we post-apply them?</a:t>
-            </a:r>
-          </a:p>
-          <a:p>
-            <a:pPr>
-              <a:spcAft>
-                <a:spcPts val="700"/>
-              </a:spcAft>
-            </a:pPr>
-            <a:r>
-              <a:rPr sz="1300" b="1" i="0">
-                <a:solidFill>
-                  <a:srgbClr val="0E5A3E"/>
-                </a:solidFill>
-                <a:latin typeface="Arial"/>
-              </a:rPr>
-              <a:t>Q5.  </a:t>
-            </a:r>
-            <a:r>
-              <a:rPr sz="1250" b="0" i="0">
-                <a:solidFill>
-                  <a:srgbClr val="1F2D2D"/>
-                </a:solidFill>
-                <a:latin typeface="Arial"/>
-              </a:rPr>
-              <a:t>For Finland, is growth/disturbance driven by G4M, PREBAS, or PICUS in your setup?</a:t>
-            </a:r>
-          </a:p>
-          <a:p>
-            <a:pPr>
-              <a:spcAft>
-                <a:spcPts val="700"/>
-              </a:spcAft>
-            </a:pPr>
-            <a:r>
-              <a:rPr sz="1300" b="1" i="0">
-                <a:solidFill>
-                  <a:srgbClr val="0E5A3E"/>
-                </a:solidFill>
-                <a:latin typeface="Arial"/>
-              </a:rPr>
-              <a:t>Q6.  </a:t>
-            </a:r>
-            <a:r>
-              <a:rPr sz="1250" b="0" i="0">
-                <a:solidFill>
-                  <a:srgbClr val="1F2D2D"/>
-                </a:solidFill>
-                <a:latin typeface="Arial"/>
-              </a:rPr>
-              <a:t>D3.4 models disturbance as biomass loss only — is a salvage-wood recovery extension available or planned, or do we build the post-processing?</a:t>
-            </a:r>
-          </a:p>
-          <a:p>
-            <a:pPr>
-              <a:spcAft>
-                <a:spcPts val="700"/>
-              </a:spcAft>
-            </a:pPr>
-            <a:r>
-              <a:rPr sz="1300" b="1" i="0">
-                <a:solidFill>
-                  <a:srgbClr val="0E5A3E"/>
-                </a:solidFill>
-                <a:latin typeface="Arial"/>
-              </a:rPr>
-              <a:t>Q7.  </a:t>
-            </a:r>
-            <a:r>
-              <a:rPr sz="1250" b="0" i="0">
-                <a:solidFill>
-                  <a:srgbClr val="1F2D2D"/>
-                </a:solidFill>
-                <a:latin typeface="Arial"/>
-              </a:rPr>
-              <a:t>How should calamity-wood carbon be treated in Finland's LULUCF / forest reference level for the coupled GHG budget?</a:t>
-            </a:r>
-          </a:p>
-          <a:p>
-            <a:pPr>
-              <a:spcAft>
-                <a:spcPts val="700"/>
-              </a:spcAft>
-            </a:pPr>
-            <a:r>
-              <a:rPr sz="1300" b="1" i="0">
-                <a:solidFill>
-                  <a:srgbClr val="0E5A3E"/>
-                </a:solidFill>
-                <a:latin typeface="Arial"/>
-              </a:rPr>
-              <a:t>Q8.  </a:t>
-            </a:r>
-            <a:r>
-              <a:rPr sz="1250" b="0" i="0">
-                <a:solidFill>
-                  <a:srgbClr val="1F2D2D"/>
-                </a:solidFill>
-                <a:latin typeface="Arial"/>
-              </a:rPr>
-              <a:t>Is there a BeWhere capability for construction / HWP supply chains (Schipfer / Tiwari), and on what timeline?</a:t>
-            </a:r>
-          </a:p>
-        </p:txBody>
-      </p:sp>
-      <p:sp>
-        <p:nvSpPr>
-          <p:cNvPr id="6" name="TextBox 5"/>
-          <p:cNvSpPr txBox="1"/>
-          <p:nvPr/>
-        </p:nvSpPr>
-        <p:spPr>
-          <a:xfrm>
-            <a:off x="457200" y="6428232"/>
-            <a:ext cx="8229600" cy="320040"/>
-          </a:xfrm>
-          <a:prstGeom prst="rect">
-            <a:avLst/>
-          </a:prstGeom>
-          <a:noFill/>
-        </p:spPr>
-        <p:txBody>
-          <a:bodyPr wrap="square">
-            <a:spAutoFit/>
-          </a:bodyPr>
-          <a:lstStyle/>
-          <a:p>
-            <a:r>
-              <a:rPr sz="850" b="0" i="0">
-                <a:solidFill>
-                  <a:srgbClr val="5A6363"/>
-                </a:solidFill>
-                <a:latin typeface="Arial"/>
-              </a:rPr>
-              <a:t>M. Bordenave · Forest–Energy coupling for Finland · IIASA meeting, 9 Oct 2026</a:t>
-            </a:r>
-          </a:p>
-        </p:txBody>
-      </p:sp>
-      <p:sp>
-        <p:nvSpPr>
-          <p:cNvPr id="7" name="TextBox 6"/>
-          <p:cNvSpPr txBox="1"/>
-          <p:nvPr/>
-        </p:nvSpPr>
-        <p:spPr>
-          <a:xfrm>
-            <a:off x="11338560" y="6428232"/>
-            <a:ext cx="548640" cy="320040"/>
-          </a:xfrm>
-          <a:prstGeom prst="rect">
-            <a:avLst/>
-          </a:prstGeom>
-          <a:noFill/>
-        </p:spPr>
-        <p:txBody>
-          <a:bodyPr wrap="square">
-            <a:spAutoFit/>
-          </a:bodyPr>
-          <a:lstStyle/>
-          <a:p>
-            <a:pPr algn="r"/>
-            <a:r>
-              <a:rPr sz="900" b="1" i="0">
-                <a:solidFill>
-                  <a:srgbClr val="5A6363"/>
-                </a:solidFill>
-                <a:latin typeface="Arial"/>
-              </a:rPr>
-              <a:t>15</a:t>
-            </a:r>
-          </a:p>
-        </p:txBody>
-      </p:sp>
-    </p:spTree>
-  </p:cSld>
-  <p:clrMapOvr>
-    <a:masterClrMapping/>
-  </p:clrMapOvr>
-</p:sld>
-</file>
-
-<file path=ppt/slides/slide17.xml><?xml version="1.0" encoding="utf-8"?>
-<p:sld xmlns:a="http://schemas.openxmlformats.org/drawingml/2006/main" xmlns:r="http://schemas.openxmlformats.org/officeDocument/2006/relationships" xmlns:p="http://schemas.openxmlformats.org/presentationml/2006/main">
-  <p:cSld>
-    <p:spTree>
-      <p:nvGrpSpPr>
-        <p:cNvPr id="1" name=""/>
-        <p:cNvGrpSpPr/>
-        <p:nvPr/>
-      </p:nvGrpSpPr>
-      <p:grpSpPr>
-        <a:xfrm>
-          <a:off x="0" y="0"/>
-          <a:ext cx="0" cy="0"/>
-          <a:chOff x="0" y="0"/>
-          <a:chExt cx="0" cy="0"/>
-        </a:xfrm>
-      </p:grpSpPr>
-      <p:sp>
-        <p:nvSpPr>
-          <p:cNvPr id="2" name="Rectangle 1"/>
-          <p:cNvSpPr/>
-          <p:nvPr/>
-        </p:nvSpPr>
-        <p:spPr>
-          <a:xfrm>
-            <a:off x="0" y="0"/>
-            <a:ext cx="12191695" cy="6858000"/>
-          </a:xfrm>
-          <a:prstGeom prst="rect">
-            <a:avLst/>
-          </a:prstGeom>
-          <a:solidFill>
-            <a:srgbClr val="158158"/>
-          </a:solidFill>
-          <a:ln>
-            <a:noFill/>
-          </a:ln>
-          <a:effectLst/>
-        </p:spPr>
-        <p:style>
-          <a:lnRef idx="1">
-            <a:schemeClr val="accent1"/>
-          </a:lnRef>
-          <a:fillRef idx="3">
-            <a:schemeClr val="accent1"/>
-          </a:fillRef>
-          <a:effectRef idx="2">
-            <a:schemeClr val="accent1"/>
-          </a:effectRef>
-          <a:fontRef idx="minor">
-            <a:schemeClr val="lt1"/>
-          </a:fontRef>
-        </p:style>
-        <p:txBody>
-          <a:bodyPr rtlCol="0" anchor="ctr"/>
-          <a:lstStyle/>
-          <a:p>
-            <a:pPr algn="ctr"/>
-            <a:endParaRPr/>
-          </a:p>
-        </p:txBody>
-      </p:sp>
-      <p:sp>
-        <p:nvSpPr>
-          <p:cNvPr id="3" name="Rectangle 2"/>
-          <p:cNvSpPr/>
-          <p:nvPr/>
-        </p:nvSpPr>
-        <p:spPr>
-          <a:xfrm>
-            <a:off x="0" y="3291840"/>
-            <a:ext cx="12191695" cy="45720"/>
-          </a:xfrm>
-          <a:prstGeom prst="rect">
-            <a:avLst/>
-          </a:prstGeom>
-          <a:solidFill>
-            <a:srgbClr val="50B432"/>
-          </a:solidFill>
-          <a:ln>
-            <a:noFill/>
-          </a:ln>
-          <a:effectLst/>
-        </p:spPr>
-        <p:style>
-          <a:lnRef idx="1">
-            <a:schemeClr val="accent1"/>
-          </a:lnRef>
-          <a:fillRef idx="3">
-            <a:schemeClr val="accent1"/>
-          </a:fillRef>
-          <a:effectRef idx="2">
-            <a:schemeClr val="accent1"/>
-          </a:effectRef>
-          <a:fontRef idx="minor">
-            <a:schemeClr val="lt1"/>
-          </a:fontRef>
-        </p:style>
-        <p:txBody>
-          <a:bodyPr rtlCol="0" anchor="ctr"/>
-          <a:lstStyle/>
-          <a:p>
-            <a:pPr algn="ctr"/>
-            <a:endParaRPr/>
-          </a:p>
-        </p:txBody>
-      </p:sp>
-      <p:sp>
-        <p:nvSpPr>
-          <p:cNvPr id="4" name="TextBox 3"/>
-          <p:cNvSpPr txBox="1"/>
-          <p:nvPr/>
-        </p:nvSpPr>
-        <p:spPr>
-          <a:xfrm>
-            <a:off x="822960" y="2011680"/>
-            <a:ext cx="10515600" cy="1828800"/>
-          </a:xfrm>
-          <a:prstGeom prst="rect">
-            <a:avLst/>
-          </a:prstGeom>
-          <a:noFill/>
-        </p:spPr>
-        <p:txBody>
-          <a:bodyPr wrap="square">
-            <a:spAutoFit/>
-          </a:bodyPr>
-          <a:lstStyle/>
-          <a:p>
-            <a:r>
-              <a:rPr sz="2600" b="0" i="0">
-                <a:solidFill>
-                  <a:srgbClr val="D6ECDE"/>
-                </a:solidFill>
-                <a:latin typeface="Arial"/>
-              </a:rPr>
-              <a:t>From a static biomass ladder …</a:t>
-            </a:r>
-          </a:p>
-          <a:p>
-            <a:pPr>
-              <a:spcBef>
-                <a:spcPts val="1000"/>
-              </a:spcBef>
-            </a:pPr>
-            <a:r>
-              <a:rPr sz="2600" b="1" i="0">
-                <a:solidFill>
-                  <a:srgbClr val="FFFFFF"/>
-                </a:solidFill>
-                <a:latin typeface="Arial"/>
-              </a:rPr>
-              <a:t>… to a dynamic, disturbance- and sink-aware forest–energy coupling for Finland</a:t>
-            </a:r>
-          </a:p>
-        </p:txBody>
-      </p:sp>
-      <p:sp>
-        <p:nvSpPr>
-          <p:cNvPr id="5" name="TextBox 4"/>
-          <p:cNvSpPr txBox="1"/>
-          <p:nvPr/>
-        </p:nvSpPr>
-        <p:spPr>
-          <a:xfrm>
-            <a:off x="822960" y="4572000"/>
-            <a:ext cx="10515600" cy="1097280"/>
-          </a:xfrm>
-          <a:prstGeom prst="rect">
-            <a:avLst/>
-          </a:prstGeom>
-          <a:noFill/>
-        </p:spPr>
-        <p:txBody>
-          <a:bodyPr wrap="square">
-            <a:spAutoFit/>
-          </a:bodyPr>
-          <a:lstStyle/>
-          <a:p>
-            <a:r>
-              <a:rPr sz="1800" b="0" i="1">
-                <a:solidFill>
-                  <a:srgbClr val="C9E8D6"/>
-                </a:solidFill>
-                <a:latin typeface="Arial"/>
-              </a:rPr>
-              <a:t>Discussion — thank you</a:t>
-            </a:r>
-          </a:p>
-        </p:txBody>
-      </p:sp>
-    </p:spTree>
-  </p:cSld>
-  <p:clrMapOvr>
-    <a:masterClrMapping/>
-  </p:clrMapOvr>
-</p:sld>
-</file>
-
-<file path=ppt/slides/slide18.xml><?xml version="1.0" encoding="utf-8"?>
 <p:sld xmlns:a="http://schemas.openxmlformats.org/drawingml/2006/main" xmlns:r="http://schemas.openxmlformats.org/officeDocument/2006/relationships" xmlns:p="http://schemas.openxmlformats.org/presentationml/2006/main">
   <p:cSld>
     <p:spTree>
